--- a/docs/activities/Unit-03-Probability.pptx
+++ b/docs/activities/Unit-03-Probability.pptx
@@ -9,6 +9,11 @@
     <p:sldId id="257" r:id="rId3"/>
     <p:sldId id="258" r:id="rId4"/>
     <p:sldId id="259" r:id="rId5"/>
+    <p:sldId id="260" r:id="rId6"/>
+    <p:sldId id="261" r:id="rId7"/>
+    <p:sldId id="262" r:id="rId8"/>
+    <p:sldId id="263" r:id="rId9"/>
+    <p:sldId id="264" r:id="rId10"/>
   </p:sldIdLst>
   <p:sldSz cx="9144000" cy="6858000" type="screen4x3"/>
   <p:notesSz cx="6858000" cy="9144000"/>
@@ -3419,6 +3424,1133 @@
                                           <p:spTgt spid="3">
                                             <p:txEl>
                                               <p:pRg st="3" end="3"/>
+                                            </p:txEl>
+                                          </p:spTgt>
+                                        </p:tgtEl>
+                                        <p:attrNameLst>
+                                          <p:attrName>style.visibility</p:attrName>
+                                        </p:attrNameLst>
+                                      </p:cBhvr>
+                                      <p:to>
+                                        <p:strVal val="visible"/>
+                                      </p:to>
+                                    </p:set>
+                                  </p:childTnLst>
+                                </p:cTn>
+                              </p:par>
+                            </p:childTnLst>
+                          </p:cTn>
+                        </p:par>
+                      </p:childTnLst>
+                    </p:cTn>
+                  </p:par>
+                </p:childTnLst>
+              </p:cTn>
+              <p:prevCondLst>
+                <p:cond evt="onPrev" delay="0">
+                  <p:tgtEl>
+                    <p:sldTgt/>
+                  </p:tgtEl>
+                </p:cond>
+              </p:prevCondLst>
+              <p:nextCondLst>
+                <p:cond evt="onNext" delay="0">
+                  <p:tgtEl>
+                    <p:sldTgt/>
+                  </p:tgtEl>
+                </p:cond>
+              </p:nextCondLst>
+            </p:seq>
+          </p:childTnLst>
+        </p:cTn>
+      </p:par>
+    </p:tnLst>
+    <p:bldLst>
+      <p:bldP spid="3" grpId="0" uiExpand="1" build="p"/>
+    </p:bldLst>
+  </p:timing>
+</p:sld>
+</file>
+
+<file path=ppt/slides/slide5.xml><?xml version="1.0" encoding="utf-8"?>
+<p:sld xmlns:a="http://schemas.openxmlformats.org/drawingml/2006/main" xmlns:r="http://schemas.openxmlformats.org/officeDocument/2006/relationships" xmlns:p="http://schemas.openxmlformats.org/presentationml/2006/main">
+  <p:cSld>
+    <p:spTree>
+      <p:nvGrpSpPr>
+        <p:cNvPr id="1" name=""/>
+        <p:cNvGrpSpPr/>
+        <p:nvPr/>
+      </p:nvGrpSpPr>
+      <p:grpSpPr>
+        <a:xfrm>
+          <a:off x="0" y="0"/>
+          <a:ext cx="0" cy="0"/>
+          <a:chOff x="0" y="0"/>
+          <a:chExt cx="0" cy="0"/>
+        </a:xfrm>
+      </p:grpSpPr>
+      <p:sp>
+        <p:nvSpPr>
+          <p:cNvPr id="2" name="Title 1"/>
+          <p:cNvSpPr>
+            <a:spLocks noGrp="1"/>
+          </p:cNvSpPr>
+          <p:nvPr>
+            <p:ph type="title"/>
+          </p:nvPr>
+        </p:nvSpPr>
+        <p:spPr>
+          <a:xfrm>
+            <a:off x="722313" y="1660820"/>
+            <a:ext cx="7772400" cy="4108156"/>
+          </a:xfrm>
+          <a:prstGeom prst="rect">
+            <a:avLst/>
+          </a:prstGeom>
+        </p:spPr>
+        <p:txBody>
+          <a:bodyPr/>
+          <a:lstStyle/>
+          <a:p>
+            <a:pPr lvl="0" indent="0" marL="0">
+              <a:buNone/>
+            </a:pPr>
+            <a:r>
+              <a:rPr/>
+              <a:t>Probability</a:t>
+            </a:r>
+          </a:p>
+        </p:txBody>
+      </p:sp>
+      <p:sp>
+        <p:nvSpPr>
+          <p:cNvPr id="3" name="Slide Number Placeholder 2"/>
+          <p:cNvSpPr>
+            <a:spLocks noGrp="1"/>
+          </p:cNvSpPr>
+          <p:nvPr>
+            <p:ph idx="10" sz="quarter" type="sldNum"/>
+          </p:nvPr>
+        </p:nvSpPr>
+        <p:spPr/>
+        <p:txBody>
+          <a:bodyPr/>
+          <a:lstStyle/>
+          <a:p>
+            <a:fld id="{9C13042B-154E-4D18-B726-07B2F714EFCF}" type="slidenum">
+              <a:rPr lang="en-US" smtClean="0"/>
+              <a:pPr/>
+              <a:t>‹#›</a:t>
+            </a:fld>
+            <a:endParaRPr dirty="0" lang="en-US"/>
+          </a:p>
+        </p:txBody>
+      </p:sp>
+    </p:spTree>
+  </p:cSld>
+</p:sld>
+</file>
+
+<file path=ppt/slides/slide6.xml><?xml version="1.0" encoding="utf-8"?>
+<p:sld xmlns:a="http://schemas.openxmlformats.org/drawingml/2006/main" xmlns:r="http://schemas.openxmlformats.org/officeDocument/2006/relationships" xmlns:p="http://schemas.openxmlformats.org/presentationml/2006/main">
+  <p:cSld>
+    <p:spTree>
+      <p:nvGrpSpPr>
+        <p:cNvPr id="1" name=""/>
+        <p:cNvGrpSpPr/>
+        <p:nvPr/>
+      </p:nvGrpSpPr>
+      <p:grpSpPr>
+        <a:xfrm>
+          <a:off x="0" y="0"/>
+          <a:ext cx="0" cy="0"/>
+          <a:chOff x="0" y="0"/>
+          <a:chExt cx="0" cy="0"/>
+        </a:xfrm>
+      </p:grpSpPr>
+      <p:sp>
+        <p:nvSpPr>
+          <p:cNvPr id="2" name="Title Placeholder 1"/>
+          <p:cNvSpPr>
+            <a:spLocks noGrp="1"/>
+          </p:cNvSpPr>
+          <p:nvPr>
+            <p:ph type="title"/>
+          </p:nvPr>
+        </p:nvSpPr>
+        <p:spPr bwMode="auto">
+          <a:xfrm>
+            <a:off x="433680" y="423297"/>
+            <a:ext cx="8229600" cy="784602"/>
+          </a:xfrm>
+          <a:prstGeom prst="rect">
+            <a:avLst/>
+          </a:prstGeom>
+          <a:noFill/>
+          <a:ln w="9525">
+            <a:noFill/>
+            <a:miter lim="800000"/>
+            <a:headEnd/>
+            <a:tailEnd/>
+          </a:ln>
+        </p:spPr>
+        <p:txBody>
+          <a:bodyPr/>
+          <a:lstStyle/>
+          <a:p>
+            <a:pPr lvl="0" indent="0" marL="0">
+              <a:buNone/>
+            </a:pPr>
+            <a:r>
+              <a:rPr/>
+              <a:t>Class Notes</a:t>
+            </a:r>
+          </a:p>
+        </p:txBody>
+      </p:sp>
+      <p:sp>
+        <p:nvSpPr>
+          <p:cNvPr id="3" name="Text Placeholder 2"/>
+          <p:cNvSpPr>
+            <a:spLocks noGrp="1"/>
+          </p:cNvSpPr>
+          <p:nvPr>
+            <p:ph idx="1"/>
+          </p:nvPr>
+        </p:nvSpPr>
+        <p:spPr/>
+        <p:txBody>
+          <a:bodyPr/>
+          <a:lstStyle/>
+          <a:p>
+            <a:pPr lvl="0"/>
+            <a:r>
+              <a:rPr/>
+              <a:t>Live class lecture notes</a:t>
+            </a:r>
+          </a:p>
+          <a:p>
+            <a:pPr lvl="0"/>
+            <a:r>
+              <a:rPr/>
+              <a:t>I usually post the class notes on Canvas by the end of the day. If you don’t see it, shoot me an email next day!</a:t>
+            </a:r>
+          </a:p>
+        </p:txBody>
+      </p:sp>
+      <p:sp>
+        <p:nvSpPr>
+          <p:cNvPr id="4" name="Slide Number Placeholder 3"/>
+          <p:cNvSpPr>
+            <a:spLocks noGrp="1"/>
+          </p:cNvSpPr>
+          <p:nvPr>
+            <p:ph idx="10" sz="quarter" type="sldNum"/>
+          </p:nvPr>
+        </p:nvSpPr>
+        <p:spPr/>
+        <p:txBody>
+          <a:bodyPr/>
+          <a:lstStyle/>
+          <a:p>
+            <a:fld id="{9C13042B-154E-4D18-B726-07B2F714EFCF}" type="slidenum">
+              <a:rPr lang="en-US" smtClean="0"/>
+              <a:pPr/>
+              <a:t>‹#›</a:t>
+            </a:fld>
+            <a:endParaRPr dirty="0" lang="en-US"/>
+          </a:p>
+        </p:txBody>
+      </p:sp>
+    </p:spTree>
+  </p:cSld>
+</p:sld>
+</file>
+
+<file path=ppt/slides/slide7.xml><?xml version="1.0" encoding="utf-8"?>
+<p:sld xmlns:a="http://schemas.openxmlformats.org/drawingml/2006/main" xmlns:r="http://schemas.openxmlformats.org/officeDocument/2006/relationships" xmlns:p="http://schemas.openxmlformats.org/presentationml/2006/main">
+  <p:cSld>
+    <p:spTree>
+      <p:nvGrpSpPr>
+        <p:cNvPr id="1" name=""/>
+        <p:cNvGrpSpPr/>
+        <p:nvPr/>
+      </p:nvGrpSpPr>
+      <p:grpSpPr>
+        <a:xfrm>
+          <a:off x="0" y="0"/>
+          <a:ext cx="0" cy="0"/>
+          <a:chOff x="0" y="0"/>
+          <a:chExt cx="0" cy="0"/>
+        </a:xfrm>
+      </p:grpSpPr>
+      <p:sp>
+        <p:nvSpPr>
+          <p:cNvPr id="2" name="Title Placeholder 1"/>
+          <p:cNvSpPr>
+            <a:spLocks noGrp="1"/>
+          </p:cNvSpPr>
+          <p:nvPr>
+            <p:ph type="title"/>
+          </p:nvPr>
+        </p:nvSpPr>
+        <p:spPr bwMode="auto">
+          <a:xfrm>
+            <a:off x="433680" y="423297"/>
+            <a:ext cx="8229600" cy="784602"/>
+          </a:xfrm>
+          <a:prstGeom prst="rect">
+            <a:avLst/>
+          </a:prstGeom>
+          <a:noFill/>
+          <a:ln w="9525">
+            <a:noFill/>
+            <a:miter lim="800000"/>
+            <a:headEnd/>
+            <a:tailEnd/>
+          </a:ln>
+        </p:spPr>
+        <p:txBody>
+          <a:bodyPr/>
+          <a:lstStyle/>
+          <a:p>
+            <a:pPr lvl="0" indent="0" marL="0">
+              <a:buNone/>
+            </a:pPr>
+            <a:r>
+              <a:rPr/>
+              <a:t>Coin Toss Applet</a:t>
+            </a:r>
+          </a:p>
+        </p:txBody>
+      </p:sp>
+      <p:sp>
+        <p:nvSpPr>
+          <p:cNvPr id="3" name="Text Placeholder 2"/>
+          <p:cNvSpPr>
+            <a:spLocks noGrp="1"/>
+          </p:cNvSpPr>
+          <p:nvPr>
+            <p:ph idx="1"/>
+          </p:nvPr>
+        </p:nvSpPr>
+        <p:spPr/>
+        <p:txBody>
+          <a:bodyPr/>
+          <a:lstStyle/>
+          <a:p>
+            <a:pPr lvl="0"/>
+            <a:r>
+              <a:rPr>
+                <a:hlinkClick r:id="rId2"/>
+              </a:rPr>
+              <a:t>Rossman/Chance Coin Tossing Simulation</a:t>
+            </a:r>
+          </a:p>
+        </p:txBody>
+      </p:sp>
+      <p:sp>
+        <p:nvSpPr>
+          <p:cNvPr id="4" name="Slide Number Placeholder 3"/>
+          <p:cNvSpPr>
+            <a:spLocks noGrp="1"/>
+          </p:cNvSpPr>
+          <p:nvPr>
+            <p:ph idx="10" sz="quarter" type="sldNum"/>
+          </p:nvPr>
+        </p:nvSpPr>
+        <p:spPr/>
+        <p:txBody>
+          <a:bodyPr/>
+          <a:lstStyle/>
+          <a:p>
+            <a:fld id="{9C13042B-154E-4D18-B726-07B2F714EFCF}" type="slidenum">
+              <a:rPr lang="en-US" smtClean="0"/>
+              <a:pPr/>
+              <a:t>‹#›</a:t>
+            </a:fld>
+            <a:endParaRPr dirty="0" lang="en-US"/>
+          </a:p>
+        </p:txBody>
+      </p:sp>
+    </p:spTree>
+  </p:cSld>
+</p:sld>
+</file>
+
+<file path=ppt/slides/slide8.xml><?xml version="1.0" encoding="utf-8"?>
+<p:sld xmlns:a="http://schemas.openxmlformats.org/drawingml/2006/main" xmlns:r="http://schemas.openxmlformats.org/officeDocument/2006/relationships" xmlns:p="http://schemas.openxmlformats.org/presentationml/2006/main">
+  <p:cSld>
+    <p:spTree>
+      <p:nvGrpSpPr>
+        <p:cNvPr id="1" name=""/>
+        <p:cNvGrpSpPr/>
+        <p:nvPr/>
+      </p:nvGrpSpPr>
+      <p:grpSpPr>
+        <a:xfrm>
+          <a:off x="0" y="0"/>
+          <a:ext cx="0" cy="0"/>
+          <a:chOff x="0" y="0"/>
+          <a:chExt cx="0" cy="0"/>
+        </a:xfrm>
+      </p:grpSpPr>
+      <p:sp>
+        <p:nvSpPr>
+          <p:cNvPr id="2" name="Title Placeholder 1"/>
+          <p:cNvSpPr>
+            <a:spLocks noGrp="1"/>
+          </p:cNvSpPr>
+          <p:nvPr>
+            <p:ph type="title"/>
+          </p:nvPr>
+        </p:nvSpPr>
+        <p:spPr bwMode="auto">
+          <a:xfrm>
+            <a:off x="433680" y="423297"/>
+            <a:ext cx="8229600" cy="784602"/>
+          </a:xfrm>
+          <a:prstGeom prst="rect">
+            <a:avLst/>
+          </a:prstGeom>
+          <a:noFill/>
+          <a:ln w="9525">
+            <a:noFill/>
+            <a:miter lim="800000"/>
+            <a:headEnd/>
+            <a:tailEnd/>
+          </a:ln>
+        </p:spPr>
+        <p:txBody>
+          <a:bodyPr/>
+          <a:lstStyle/>
+          <a:p>
+            <a:pPr lvl="0" indent="0" marL="0">
+              <a:buNone/>
+            </a:pPr>
+            <a:r>
+              <a:rPr/>
+              <a:t>Interpretation of Probability</a:t>
+            </a:r>
+          </a:p>
+        </p:txBody>
+      </p:sp>
+      <mc:AlternateContent xmlns:mc="http://schemas.openxmlformats.org/markup-compatibility/2006">
+        <mc:Choice xmlns:a14="http://schemas.microsoft.com/office/drawing/2010/main" Requires="a14">
+          <p:sp>
+            <p:nvSpPr>
+              <p:cNvPr id="3" name="Text Placeholder 2"/>
+              <p:cNvSpPr>
+                <a:spLocks noGrp="1"/>
+              </p:cNvSpPr>
+              <p:nvPr>
+                <p:ph idx="1"/>
+              </p:nvPr>
+            </p:nvSpPr>
+            <p:spPr/>
+            <p:txBody>
+              <a:bodyPr/>
+              <a:lstStyle/>
+              <a:p>
+                <a:pPr lvl="0"/>
+                <a:r>
+                  <a:rPr b="1"/>
+                  <a:t>Examples:</a:t>
+                </a:r>
+              </a:p>
+              <a:p>
+                <a:pPr lvl="1"/>
+                <a:r>
+                  <a:rPr/>
+                  <a:t>“The chance of getting 1 when rolling a die is </a:t>
+                </a:r>
+                <a14:m>
+                  <m:oMath xmlns:m="http://schemas.openxmlformats.org/officeDocument/2006/math">
+                    <m:r>
+                      <m:t>1</m:t>
+                    </m:r>
+                    <m:r>
+                      <m:rPr>
+                        <m:sty m:val="p"/>
+                      </m:rPr>
+                      <m:t>/</m:t>
+                    </m:r>
+                    <m:r>
+                      <m:t>6</m:t>
+                    </m:r>
+                    <m:r>
+                      <m:rPr>
+                        <m:sty m:val="p"/>
+                      </m:rPr>
+                      <m:t>=</m:t>
+                    </m:r>
+                    <m:r>
+                      <m:t>16.7</m:t>
+                    </m:r>
+                    <m:r>
+                      <m:rPr>
+                        <m:sty m:val="p"/>
+                      </m:rPr>
+                      <m:t>%</m:t>
+                    </m:r>
+                  </m:oMath>
+                </a14:m>
+                <a:r>
+                  <a:rPr/>
+                  <a:t>.”</a:t>
+                </a:r>
+              </a:p>
+              <a:p>
+                <a:pPr lvl="1"/>
+                <a:r>
+                  <a:rPr/>
+                  <a:t>Meaning: If we roll a die many times under the same conditions, we would get 1 roughly </a:t>
+                </a:r>
+                <a14:m>
+                  <m:oMath xmlns:m="http://schemas.openxmlformats.org/officeDocument/2006/math">
+                    <m:r>
+                      <m:t>16.7</m:t>
+                    </m:r>
+                    <m:r>
+                      <m:rPr>
+                        <m:sty m:val="p"/>
+                      </m:rPr>
+                      <m:t>%</m:t>
+                    </m:r>
+                  </m:oMath>
+                </a14:m>
+                <a:r>
+                  <a:rPr/>
+                  <a:t> of the time.</a:t>
+                </a:r>
+              </a:p>
+              <a:p>
+                <a:pPr lvl="1"/>
+                <a:r>
+                  <a:rPr/>
+                  <a:t>“The chance that a light bulb lasts longer than 2 years is </a:t>
+                </a:r>
+                <a14:m>
+                  <m:oMath xmlns:m="http://schemas.openxmlformats.org/officeDocument/2006/math">
+                    <m:r>
+                      <m:t>72</m:t>
+                    </m:r>
+                    <m:r>
+                      <m:rPr>
+                        <m:sty m:val="p"/>
+                      </m:rPr>
+                      <m:t>%</m:t>
+                    </m:r>
+                  </m:oMath>
+                </a14:m>
+                <a:r>
+                  <a:rPr/>
+                  <a:t>.”</a:t>
+                </a:r>
+              </a:p>
+              <a:p>
+                <a:pPr lvl="1"/>
+                <a:r>
+                  <a:rPr/>
+                  <a:t>Meaning: If we turn on many light bulbs under the same conditions, about </a:t>
+                </a:r>
+                <a14:m>
+                  <m:oMath xmlns:m="http://schemas.openxmlformats.org/officeDocument/2006/math">
+                    <m:r>
+                      <m:t>72</m:t>
+                    </m:r>
+                    <m:r>
+                      <m:rPr>
+                        <m:sty m:val="p"/>
+                      </m:rPr>
+                      <m:t>%</m:t>
+                    </m:r>
+                  </m:oMath>
+                </a14:m>
+                <a:r>
+                  <a:rPr/>
+                  <a:t> of them would last longer than 2 years.</a:t>
+                </a:r>
+              </a:p>
+            </p:txBody>
+          </p:sp>
+        </mc:Choice>
+      </mc:AlternateContent>
+      <p:sp>
+        <p:nvSpPr>
+          <p:cNvPr id="4" name="Slide Number Placeholder 3"/>
+          <p:cNvSpPr>
+            <a:spLocks noGrp="1"/>
+          </p:cNvSpPr>
+          <p:nvPr>
+            <p:ph idx="10" sz="quarter" type="sldNum"/>
+          </p:nvPr>
+        </p:nvSpPr>
+        <p:spPr/>
+        <p:txBody>
+          <a:bodyPr/>
+          <a:lstStyle/>
+          <a:p>
+            <a:fld id="{9C13042B-154E-4D18-B726-07B2F714EFCF}" type="slidenum">
+              <a:rPr lang="en-US" smtClean="0"/>
+              <a:pPr/>
+              <a:t>‹#›</a:t>
+            </a:fld>
+            <a:endParaRPr dirty="0" lang="en-US"/>
+          </a:p>
+        </p:txBody>
+      </p:sp>
+    </p:spTree>
+  </p:cSld>
+  <p:timing>
+    <p:tnLst>
+      <p:par>
+        <p:cTn id="1" dur="indefinite" restart="never" nodeType="tmRoot">
+          <p:childTnLst>
+            <p:seq concurrent="1" nextAc="seek">
+              <p:cTn id="2" dur="indefinite" nodeType="mainSeq">
+                <p:childTnLst>
+                  <p:par>
+                    <p:cTn id="3" fill="hold">
+                      <p:stCondLst>
+                        <p:cond delay="indefinite"/>
+                      </p:stCondLst>
+                      <p:childTnLst>
+                        <p:par>
+                          <p:cTn id="4" fill="hold">
+                            <p:stCondLst>
+                              <p:cond delay="0"/>
+                            </p:stCondLst>
+                            <p:childTnLst>
+                              <p:par>
+                                <p:cTn id="5" presetID="1" presetClass="entr" presetSubtype="0" fill="hold" grpId="0" nodeType="clickEffect">
+                                  <p:stCondLst>
+                                    <p:cond delay="0"/>
+                                  </p:stCondLst>
+                                  <p:childTnLst>
+                                    <p:set>
+                                      <p:cBhvr>
+                                        <p:cTn id="6" dur="1" fill="hold">
+                                          <p:stCondLst>
+                                            <p:cond delay="0"/>
+                                          </p:stCondLst>
+                                        </p:cTn>
+                                        <p:tgtEl>
+                                          <p:spTgt spid="3">
+                                            <p:txEl>
+                                              <p:pRg st="0" end="0"/>
+                                            </p:txEl>
+                                          </p:spTgt>
+                                        </p:tgtEl>
+                                        <p:attrNameLst>
+                                          <p:attrName>style.visibility</p:attrName>
+                                        </p:attrNameLst>
+                                      </p:cBhvr>
+                                      <p:to>
+                                        <p:strVal val="visible"/>
+                                      </p:to>
+                                    </p:set>
+                                  </p:childTnLst>
+                                </p:cTn>
+                              </p:par>
+                            </p:childTnLst>
+                          </p:cTn>
+                        </p:par>
+                      </p:childTnLst>
+                    </p:cTn>
+                  </p:par>
+                  <p:par>
+                    <p:cTn id="7" fill="hold">
+                      <p:stCondLst>
+                        <p:cond delay="indefinite"/>
+                      </p:stCondLst>
+                      <p:childTnLst>
+                        <p:par>
+                          <p:cTn id="8" fill="hold">
+                            <p:stCondLst>
+                              <p:cond delay="0"/>
+                            </p:stCondLst>
+                            <p:childTnLst>
+                              <p:par>
+                                <p:cTn id="9" presetID="1" presetClass="entr" presetSubtype="0" fill="hold" grpId="0" nodeType="clickEffect">
+                                  <p:stCondLst>
+                                    <p:cond delay="0"/>
+                                  </p:stCondLst>
+                                  <p:childTnLst>
+                                    <p:set>
+                                      <p:cBhvr>
+                                        <p:cTn id="10" dur="1" fill="hold">
+                                          <p:stCondLst>
+                                            <p:cond delay="0"/>
+                                          </p:stCondLst>
+                                        </p:cTn>
+                                        <p:tgtEl>
+                                          <p:spTgt spid="3">
+                                            <p:txEl>
+                                              <p:pRg st="1" end="1"/>
+                                            </p:txEl>
+                                          </p:spTgt>
+                                        </p:tgtEl>
+                                        <p:attrNameLst>
+                                          <p:attrName>style.visibility</p:attrName>
+                                        </p:attrNameLst>
+                                      </p:cBhvr>
+                                      <p:to>
+                                        <p:strVal val="visible"/>
+                                      </p:to>
+                                    </p:set>
+                                  </p:childTnLst>
+                                </p:cTn>
+                              </p:par>
+                            </p:childTnLst>
+                          </p:cTn>
+                        </p:par>
+                      </p:childTnLst>
+                    </p:cTn>
+                  </p:par>
+                  <p:par>
+                    <p:cTn id="11" fill="hold">
+                      <p:stCondLst>
+                        <p:cond delay="indefinite"/>
+                      </p:stCondLst>
+                      <p:childTnLst>
+                        <p:par>
+                          <p:cTn id="12" fill="hold">
+                            <p:stCondLst>
+                              <p:cond delay="0"/>
+                            </p:stCondLst>
+                            <p:childTnLst>
+                              <p:par>
+                                <p:cTn id="13" presetID="1" presetClass="entr" presetSubtype="0" fill="hold" grpId="0" nodeType="clickEffect">
+                                  <p:stCondLst>
+                                    <p:cond delay="0"/>
+                                  </p:stCondLst>
+                                  <p:childTnLst>
+                                    <p:set>
+                                      <p:cBhvr>
+                                        <p:cTn id="14" dur="1" fill="hold">
+                                          <p:stCondLst>
+                                            <p:cond delay="0"/>
+                                          </p:stCondLst>
+                                        </p:cTn>
+                                        <p:tgtEl>
+                                          <p:spTgt spid="3">
+                                            <p:txEl>
+                                              <p:pRg st="2" end="2"/>
+                                            </p:txEl>
+                                          </p:spTgt>
+                                        </p:tgtEl>
+                                        <p:attrNameLst>
+                                          <p:attrName>style.visibility</p:attrName>
+                                        </p:attrNameLst>
+                                      </p:cBhvr>
+                                      <p:to>
+                                        <p:strVal val="visible"/>
+                                      </p:to>
+                                    </p:set>
+                                  </p:childTnLst>
+                                </p:cTn>
+                              </p:par>
+                            </p:childTnLst>
+                          </p:cTn>
+                        </p:par>
+                      </p:childTnLst>
+                    </p:cTn>
+                  </p:par>
+                  <p:par>
+                    <p:cTn id="15" fill="hold">
+                      <p:stCondLst>
+                        <p:cond delay="indefinite"/>
+                      </p:stCondLst>
+                      <p:childTnLst>
+                        <p:par>
+                          <p:cTn id="16" fill="hold">
+                            <p:stCondLst>
+                              <p:cond delay="0"/>
+                            </p:stCondLst>
+                            <p:childTnLst>
+                              <p:par>
+                                <p:cTn id="17" presetID="1" presetClass="entr" presetSubtype="0" fill="hold" grpId="0" nodeType="clickEffect">
+                                  <p:stCondLst>
+                                    <p:cond delay="0"/>
+                                  </p:stCondLst>
+                                  <p:childTnLst>
+                                    <p:set>
+                                      <p:cBhvr>
+                                        <p:cTn id="18" dur="1" fill="hold">
+                                          <p:stCondLst>
+                                            <p:cond delay="0"/>
+                                          </p:stCondLst>
+                                        </p:cTn>
+                                        <p:tgtEl>
+                                          <p:spTgt spid="3">
+                                            <p:txEl>
+                                              <p:pRg st="3" end="3"/>
+                                            </p:txEl>
+                                          </p:spTgt>
+                                        </p:tgtEl>
+                                        <p:attrNameLst>
+                                          <p:attrName>style.visibility</p:attrName>
+                                        </p:attrNameLst>
+                                      </p:cBhvr>
+                                      <p:to>
+                                        <p:strVal val="visible"/>
+                                      </p:to>
+                                    </p:set>
+                                  </p:childTnLst>
+                                </p:cTn>
+                              </p:par>
+                            </p:childTnLst>
+                          </p:cTn>
+                        </p:par>
+                      </p:childTnLst>
+                    </p:cTn>
+                  </p:par>
+                  <p:par>
+                    <p:cTn id="19" fill="hold">
+                      <p:stCondLst>
+                        <p:cond delay="indefinite"/>
+                      </p:stCondLst>
+                      <p:childTnLst>
+                        <p:par>
+                          <p:cTn id="20" fill="hold">
+                            <p:stCondLst>
+                              <p:cond delay="0"/>
+                            </p:stCondLst>
+                            <p:childTnLst>
+                              <p:par>
+                                <p:cTn id="21" presetID="1" presetClass="entr" presetSubtype="0" fill="hold" grpId="0" nodeType="clickEffect">
+                                  <p:stCondLst>
+                                    <p:cond delay="0"/>
+                                  </p:stCondLst>
+                                  <p:childTnLst>
+                                    <p:set>
+                                      <p:cBhvr>
+                                        <p:cTn id="22" dur="1" fill="hold">
+                                          <p:stCondLst>
+                                            <p:cond delay="0"/>
+                                          </p:stCondLst>
+                                        </p:cTn>
+                                        <p:tgtEl>
+                                          <p:spTgt spid="3">
+                                            <p:txEl>
+                                              <p:pRg st="4" end="4"/>
+                                            </p:txEl>
+                                          </p:spTgt>
+                                        </p:tgtEl>
+                                        <p:attrNameLst>
+                                          <p:attrName>style.visibility</p:attrName>
+                                        </p:attrNameLst>
+                                      </p:cBhvr>
+                                      <p:to>
+                                        <p:strVal val="visible"/>
+                                      </p:to>
+                                    </p:set>
+                                  </p:childTnLst>
+                                </p:cTn>
+                              </p:par>
+                            </p:childTnLst>
+                          </p:cTn>
+                        </p:par>
+                      </p:childTnLst>
+                    </p:cTn>
+                  </p:par>
+                </p:childTnLst>
+              </p:cTn>
+              <p:prevCondLst>
+                <p:cond evt="onPrev" delay="0">
+                  <p:tgtEl>
+                    <p:sldTgt/>
+                  </p:tgtEl>
+                </p:cond>
+              </p:prevCondLst>
+              <p:nextCondLst>
+                <p:cond evt="onNext" delay="0">
+                  <p:tgtEl>
+                    <p:sldTgt/>
+                  </p:tgtEl>
+                </p:cond>
+              </p:nextCondLst>
+            </p:seq>
+          </p:childTnLst>
+        </p:cTn>
+      </p:par>
+    </p:tnLst>
+    <p:bldLst>
+      <p:bldP spid="3" grpId="0" uiExpand="1" build="p"/>
+    </p:bldLst>
+  </p:timing>
+</p:sld>
+</file>
+
+<file path=ppt/slides/slide9.xml><?xml version="1.0" encoding="utf-8"?>
+<p:sld xmlns:a="http://schemas.openxmlformats.org/drawingml/2006/main" xmlns:r="http://schemas.openxmlformats.org/officeDocument/2006/relationships" xmlns:p="http://schemas.openxmlformats.org/presentationml/2006/main">
+  <p:cSld>
+    <p:spTree>
+      <p:nvGrpSpPr>
+        <p:cNvPr id="1" name=""/>
+        <p:cNvGrpSpPr/>
+        <p:nvPr/>
+      </p:nvGrpSpPr>
+      <p:grpSpPr>
+        <a:xfrm>
+          <a:off x="0" y="0"/>
+          <a:ext cx="0" cy="0"/>
+          <a:chOff x="0" y="0"/>
+          <a:chExt cx="0" cy="0"/>
+        </a:xfrm>
+      </p:grpSpPr>
+      <p:sp>
+        <p:nvSpPr>
+          <p:cNvPr id="2" name="Title Placeholder 1"/>
+          <p:cNvSpPr>
+            <a:spLocks noGrp="1"/>
+          </p:cNvSpPr>
+          <p:nvPr>
+            <p:ph type="title"/>
+          </p:nvPr>
+        </p:nvSpPr>
+        <p:spPr bwMode="auto">
+          <a:xfrm>
+            <a:off x="433680" y="423297"/>
+            <a:ext cx="8229600" cy="784602"/>
+          </a:xfrm>
+          <a:prstGeom prst="rect">
+            <a:avLst/>
+          </a:prstGeom>
+          <a:noFill/>
+          <a:ln w="9525">
+            <a:noFill/>
+            <a:miter lim="800000"/>
+            <a:headEnd/>
+            <a:tailEnd/>
+          </a:ln>
+        </p:spPr>
+        <p:txBody>
+          <a:bodyPr/>
+          <a:lstStyle/>
+          <a:p>
+            <a:pPr lvl="0" indent="0" marL="0">
+              <a:buNone/>
+            </a:pPr>
+            <a:r>
+              <a:rPr/>
+              <a:t>Axioms of Probability</a:t>
+            </a:r>
+          </a:p>
+        </p:txBody>
+      </p:sp>
+      <p:sp>
+        <p:nvSpPr>
+          <p:cNvPr id="3" name="Text Placeholder 2"/>
+          <p:cNvSpPr>
+            <a:spLocks noGrp="1"/>
+          </p:cNvSpPr>
+          <p:nvPr>
+            <p:ph idx="1"/>
+          </p:nvPr>
+        </p:nvSpPr>
+        <p:spPr/>
+        <p:txBody>
+          <a:bodyPr/>
+          <a:lstStyle/>
+          <a:p>
+            <a:pPr lvl="0"/>
+            <a:r>
+              <a:rPr/>
+              <a:t>The axioms of probability are properties that we intuitively expect a probability to have.</a:t>
+            </a:r>
+          </a:p>
+          <a:p>
+            <a:pPr lvl="0"/>
+            <a:r>
+              <a:rPr/>
+              <a:t>All probability theory is built on these axioms.</a:t>
+            </a:r>
+          </a:p>
+          <a:p>
+            <a:pPr lvl="0"/>
+            <a:r>
+              <a:rPr/>
+              <a:t>The mathematical foundations of probability, including these axioms, were laid out by </a:t>
+            </a:r>
+            <a:r>
+              <a:rPr b="1"/>
+              <a:t>Andrey Kolmogorov in 1933</a:t>
+            </a:r>
+            <a:r>
+              <a:rPr/>
+              <a:t>.</a:t>
+            </a:r>
+          </a:p>
+          <a:p>
+            <a:pPr lvl="0" indent="0" marL="0">
+              <a:buNone/>
+            </a:pPr>
+          </a:p>
+        </p:txBody>
+      </p:sp>
+      <p:sp>
+        <p:nvSpPr>
+          <p:cNvPr id="4" name="Slide Number Placeholder 3"/>
+          <p:cNvSpPr>
+            <a:spLocks noGrp="1"/>
+          </p:cNvSpPr>
+          <p:nvPr>
+            <p:ph idx="10" sz="quarter" type="sldNum"/>
+          </p:nvPr>
+        </p:nvSpPr>
+        <p:spPr/>
+        <p:txBody>
+          <a:bodyPr/>
+          <a:lstStyle/>
+          <a:p>
+            <a:fld id="{9C13042B-154E-4D18-B726-07B2F714EFCF}" type="slidenum">
+              <a:rPr lang="en-US" smtClean="0"/>
+              <a:pPr/>
+              <a:t>‹#›</a:t>
+            </a:fld>
+            <a:endParaRPr dirty="0" lang="en-US"/>
+          </a:p>
+        </p:txBody>
+      </p:sp>
+    </p:spTree>
+  </p:cSld>
+  <p:timing>
+    <p:tnLst>
+      <p:par>
+        <p:cTn id="1" dur="indefinite" restart="never" nodeType="tmRoot">
+          <p:childTnLst>
+            <p:seq concurrent="1" nextAc="seek">
+              <p:cTn id="2" dur="indefinite" nodeType="mainSeq">
+                <p:childTnLst>
+                  <p:par>
+                    <p:cTn id="3" fill="hold">
+                      <p:stCondLst>
+                        <p:cond delay="indefinite"/>
+                      </p:stCondLst>
+                      <p:childTnLst>
+                        <p:par>
+                          <p:cTn id="4" fill="hold">
+                            <p:stCondLst>
+                              <p:cond delay="0"/>
+                            </p:stCondLst>
+                            <p:childTnLst>
+                              <p:par>
+                                <p:cTn id="5" presetID="1" presetClass="entr" presetSubtype="0" fill="hold" grpId="0" nodeType="clickEffect">
+                                  <p:stCondLst>
+                                    <p:cond delay="0"/>
+                                  </p:stCondLst>
+                                  <p:childTnLst>
+                                    <p:set>
+                                      <p:cBhvr>
+                                        <p:cTn id="6" dur="1" fill="hold">
+                                          <p:stCondLst>
+                                            <p:cond delay="0"/>
+                                          </p:stCondLst>
+                                        </p:cTn>
+                                        <p:tgtEl>
+                                          <p:spTgt spid="3">
+                                            <p:txEl>
+                                              <p:pRg st="0" end="0"/>
+                                            </p:txEl>
+                                          </p:spTgt>
+                                        </p:tgtEl>
+                                        <p:attrNameLst>
+                                          <p:attrName>style.visibility</p:attrName>
+                                        </p:attrNameLst>
+                                      </p:cBhvr>
+                                      <p:to>
+                                        <p:strVal val="visible"/>
+                                      </p:to>
+                                    </p:set>
+                                  </p:childTnLst>
+                                </p:cTn>
+                              </p:par>
+                            </p:childTnLst>
+                          </p:cTn>
+                        </p:par>
+                      </p:childTnLst>
+                    </p:cTn>
+                  </p:par>
+                  <p:par>
+                    <p:cTn id="7" fill="hold">
+                      <p:stCondLst>
+                        <p:cond delay="indefinite"/>
+                      </p:stCondLst>
+                      <p:childTnLst>
+                        <p:par>
+                          <p:cTn id="8" fill="hold">
+                            <p:stCondLst>
+                              <p:cond delay="0"/>
+                            </p:stCondLst>
+                            <p:childTnLst>
+                              <p:par>
+                                <p:cTn id="9" presetID="1" presetClass="entr" presetSubtype="0" fill="hold" grpId="0" nodeType="clickEffect">
+                                  <p:stCondLst>
+                                    <p:cond delay="0"/>
+                                  </p:stCondLst>
+                                  <p:childTnLst>
+                                    <p:set>
+                                      <p:cBhvr>
+                                        <p:cTn id="10" dur="1" fill="hold">
+                                          <p:stCondLst>
+                                            <p:cond delay="0"/>
+                                          </p:stCondLst>
+                                        </p:cTn>
+                                        <p:tgtEl>
+                                          <p:spTgt spid="3">
+                                            <p:txEl>
+                                              <p:pRg st="1" end="1"/>
+                                            </p:txEl>
+                                          </p:spTgt>
+                                        </p:tgtEl>
+                                        <p:attrNameLst>
+                                          <p:attrName>style.visibility</p:attrName>
+                                        </p:attrNameLst>
+                                      </p:cBhvr>
+                                      <p:to>
+                                        <p:strVal val="visible"/>
+                                      </p:to>
+                                    </p:set>
+                                  </p:childTnLst>
+                                </p:cTn>
+                              </p:par>
+                            </p:childTnLst>
+                          </p:cTn>
+                        </p:par>
+                      </p:childTnLst>
+                    </p:cTn>
+                  </p:par>
+                  <p:par>
+                    <p:cTn id="11" fill="hold">
+                      <p:stCondLst>
+                        <p:cond delay="indefinite"/>
+                      </p:stCondLst>
+                      <p:childTnLst>
+                        <p:par>
+                          <p:cTn id="12" fill="hold">
+                            <p:stCondLst>
+                              <p:cond delay="0"/>
+                            </p:stCondLst>
+                            <p:childTnLst>
+                              <p:par>
+                                <p:cTn id="13" presetID="1" presetClass="entr" presetSubtype="0" fill="hold" grpId="0" nodeType="clickEffect">
+                                  <p:stCondLst>
+                                    <p:cond delay="0"/>
+                                  </p:stCondLst>
+                                  <p:childTnLst>
+                                    <p:set>
+                                      <p:cBhvr>
+                                        <p:cTn id="14" dur="1" fill="hold">
+                                          <p:stCondLst>
+                                            <p:cond delay="0"/>
+                                          </p:stCondLst>
+                                        </p:cTn>
+                                        <p:tgtEl>
+                                          <p:spTgt spid="3">
+                                            <p:txEl>
+                                              <p:pRg st="2" end="2"/>
                                             </p:txEl>
                                           </p:spTgt>
                                         </p:tgtEl>
